--- a/sample-documents/02-advisor-portal-search-playbook.pptx
+++ b/sample-documents/02-advisor-portal-search-playbook.pptx
@@ -12,7 +12,7 @@
           </a:p>
           <a:p>
             <a:r>
-              <a:t>Advisor Portal Search Playbook. Business area: Advisor Experience. Audience: Advisor. Content owner: Zahil John. Last reviewed age days: 130. Advisor content for finding client policy documents, service options, and education resources.</a:t>
+              <a:t>Advisor Portal Search Playbook. Business area: Advisor Experience. Audience: Advisor. Content owner: Content Owner 03. Author: Sample Author 02. Language: Spanish. Country of origin: Spain. Sentiment: Positive. Approval status: Approved. Last reviewed age days: 130. Guia para encontrar documentos de polizas y recursos educativos. Los ejemplos muestran busquedas rapidas para atender mejor a cada cliente.</a:t>
             </a:r>
           </a:p>
         </p:txBody>
